--- a/slides/1_foundations.pptx
+++ b/slides/1_foundations.pptx
@@ -12,7 +12,7 @@
     <p:sldId id="267" r:id="rId3"/>
     <p:sldId id="266" r:id="rId4"/>
     <p:sldId id="257" r:id="rId5"/>
-    <p:sldId id="549" r:id="rId6"/>
+    <p:sldId id="550" r:id="rId6"/>
     <p:sldId id="546" r:id="rId7"/>
     <p:sldId id="262" r:id="rId8"/>
     <p:sldId id="548" r:id="rId9"/>
@@ -486,7 +486,7 @@
           <a:p>
             <a:fld id="{506E0FD1-891F-4B1E-916D-E9B585160BB8}" type="datetimeFigureOut">
               <a:rPr lang="en-GB" smtClean="0"/>
-              <a:t>26/01/2026</a:t>
+              <a:t>02/03/2026</a:t>
             </a:fld>
             <a:endParaRPr lang="en-GB"/>
           </a:p>
@@ -903,7 +903,7 @@
           <a:p>
             <a:fld id="{D68C3F22-27B2-44E3-9C5F-D08126455F6F}" type="datetime1">
               <a:rPr lang="en-GB" smtClean="0"/>
-              <a:t>26/01/2026</a:t>
+              <a:t>02/03/2026</a:t>
             </a:fld>
             <a:endParaRPr lang="en-GB"/>
           </a:p>
@@ -1103,7 +1103,7 @@
           <a:p>
             <a:fld id="{1CD03846-7BF6-4FB6-A921-FF3379ADBD4C}" type="datetime1">
               <a:rPr lang="en-GB" smtClean="0"/>
-              <a:t>26/01/2026</a:t>
+              <a:t>02/03/2026</a:t>
             </a:fld>
             <a:endParaRPr lang="en-GB"/>
           </a:p>
@@ -1313,7 +1313,7 @@
           <a:p>
             <a:fld id="{99E1B91A-3FD0-4144-9C84-63E9688ED2FE}" type="datetime1">
               <a:rPr lang="en-GB" smtClean="0"/>
-              <a:t>26/01/2026</a:t>
+              <a:t>02/03/2026</a:t>
             </a:fld>
             <a:endParaRPr lang="en-GB"/>
           </a:p>
@@ -1513,7 +1513,7 @@
           <a:p>
             <a:fld id="{5295ED7B-FEAD-4734-819F-93EF4B0EA908}" type="datetime1">
               <a:rPr lang="en-GB" smtClean="0"/>
-              <a:t>26/01/2026</a:t>
+              <a:t>02/03/2026</a:t>
             </a:fld>
             <a:endParaRPr lang="en-GB"/>
           </a:p>
@@ -1789,7 +1789,7 @@
           <a:p>
             <a:fld id="{D2D5D4B4-C926-4B45-8815-1ED8911179A2}" type="datetime1">
               <a:rPr lang="en-GB" smtClean="0"/>
-              <a:t>26/01/2026</a:t>
+              <a:t>02/03/2026</a:t>
             </a:fld>
             <a:endParaRPr lang="en-GB"/>
           </a:p>
@@ -2057,7 +2057,7 @@
           <a:p>
             <a:fld id="{B4C5210A-0E37-4935-93AF-69F21A5F712F}" type="datetime1">
               <a:rPr lang="en-GB" smtClean="0"/>
-              <a:t>26/01/2026</a:t>
+              <a:t>02/03/2026</a:t>
             </a:fld>
             <a:endParaRPr lang="en-GB"/>
           </a:p>
@@ -2472,7 +2472,7 @@
           <a:p>
             <a:fld id="{3D3A6B2F-436C-4691-80E8-9C890E000E9D}" type="datetime1">
               <a:rPr lang="en-GB" smtClean="0"/>
-              <a:t>26/01/2026</a:t>
+              <a:t>02/03/2026</a:t>
             </a:fld>
             <a:endParaRPr lang="en-GB"/>
           </a:p>
@@ -2614,7 +2614,7 @@
           <a:p>
             <a:fld id="{84385F4C-D74B-496F-8D21-97E3549C783B}" type="datetime1">
               <a:rPr lang="en-GB" smtClean="0"/>
-              <a:t>26/01/2026</a:t>
+              <a:t>02/03/2026</a:t>
             </a:fld>
             <a:endParaRPr lang="en-GB"/>
           </a:p>
@@ -2727,7 +2727,7 @@
           <a:p>
             <a:fld id="{0CBDCB32-C241-4703-A832-4EB47BD54E83}" type="datetime1">
               <a:rPr lang="en-GB" smtClean="0"/>
-              <a:t>26/01/2026</a:t>
+              <a:t>02/03/2026</a:t>
             </a:fld>
             <a:endParaRPr lang="en-GB"/>
           </a:p>
@@ -3040,7 +3040,7 @@
           <a:p>
             <a:fld id="{85C150FF-BE95-4D25-A16A-E368A81CBF24}" type="datetime1">
               <a:rPr lang="en-GB" smtClean="0"/>
-              <a:t>26/01/2026</a:t>
+              <a:t>02/03/2026</a:t>
             </a:fld>
             <a:endParaRPr lang="en-GB"/>
           </a:p>
@@ -3329,7 +3329,7 @@
           <a:p>
             <a:fld id="{F3C5DB4B-B349-43C9-A424-BADA723AD9F1}" type="datetime1">
               <a:rPr lang="en-GB" smtClean="0"/>
-              <a:t>26/01/2026</a:t>
+              <a:t>02/03/2026</a:t>
             </a:fld>
             <a:endParaRPr lang="en-GB"/>
           </a:p>
@@ -3572,7 +3572,7 @@
           <a:p>
             <a:fld id="{12632426-0A0C-405F-A3D0-2D11AA44702A}" type="datetime1">
               <a:rPr lang="en-GB" smtClean="0"/>
-              <a:t>26/01/2026</a:t>
+              <a:t>02/03/2026</a:t>
             </a:fld>
             <a:endParaRPr lang="en-GB"/>
           </a:p>
@@ -5028,12 +5028,19 @@
               <a:t>action p</a:t>
             </a:r>
             <a:r>
-              <a:rPr lang="en-DE" sz="2600" b="1" dirty="0"/>
+              <a:rPr lang="en-DE" sz="2600" b="1"/>
               <a:t>olicy</a:t>
             </a:r>
+            <a:endParaRPr lang="de-DE" sz="2600" dirty="0"/>
+          </a:p>
+          <a:p>
+            <a:r>
+              <a:rPr lang="en-DE" sz="2600"/>
+              <a:t>exploration-exploitation </a:t>
+            </a:r>
             <a:r>
               <a:rPr lang="en-DE" sz="2600" dirty="0"/>
-              <a:t>: exploration-exploitation trade-off</a:t>
+              <a:t>trade-off</a:t>
             </a:r>
           </a:p>
           <a:p>
@@ -5047,22 +5054,10 @@
             </a:r>
           </a:p>
           <a:p>
-            <a:r>
-              <a:rPr lang="en-DE" sz="2600" dirty="0"/>
-              <a:t>off-policy instead of on-policy learning: </a:t>
-            </a:r>
-            <a:r>
-              <a:rPr lang="en-GB" sz="2600" dirty="0"/>
-              <a:t>p</a:t>
-            </a:r>
-            <a:r>
-              <a:rPr lang="en-DE" sz="2600" dirty="0"/>
-              <a:t>olicy for</a:t>
-            </a:r>
-            <a:r>
-              <a:rPr lang="en-GB" sz="2600" dirty="0"/>
-              <a:t> generating observations to learn from (exploration) independent from updated policy (current best)</a:t>
-            </a:r>
+            <a:pPr marL="0" indent="0">
+              <a:buNone/>
+            </a:pPr>
+            <a:endParaRPr lang="en-GB" sz="2600" b="1" dirty="0"/>
           </a:p>
           <a:p>
             <a:pPr marL="0" indent="0">
@@ -5072,9 +5067,12 @@
               <a:rPr lang="en-GB" sz="2600" b="1" dirty="0"/>
               <a:t>feedback from environment</a:t>
             </a:r>
+            <a:endParaRPr lang="en-GB" sz="2600" dirty="0"/>
+          </a:p>
+          <a:p>
             <a:r>
               <a:rPr lang="en-GB" sz="2600" dirty="0"/>
-              <a:t>: goal-directed, no supervision</a:t>
+              <a:t>goal-directed, no supervision</a:t>
             </a:r>
           </a:p>
           <a:p>
@@ -5083,15 +5081,12 @@
               <a:t>scalar r</a:t>
             </a:r>
             <a:r>
-              <a:rPr lang="en-DE" sz="2600" dirty="0"/>
+              <a:rPr lang="en-DE" sz="2600"/>
               <a:t>eward signal</a:t>
             </a:r>
-            <a:endParaRPr lang="en-GB" sz="2600" dirty="0"/>
-          </a:p>
-          <a:p>
             <a:r>
               <a:rPr lang="en-GB" sz="2600" dirty="0"/>
-              <a:t>cumulative and delayed rewards (credit assignment problem)</a:t>
+              <a:t>, cumulative and delayed (credit assignment problem)</a:t>
             </a:r>
             <a:endParaRPr lang="en-DE" sz="2600" dirty="0"/>
           </a:p>
@@ -5129,7 +5124,7 @@
     </p:spTree>
     <p:extLst>
       <p:ext uri="{BB962C8B-B14F-4D97-AF65-F5344CB8AC3E}">
-        <p14:creationId xmlns:p14="http://schemas.microsoft.com/office/powerpoint/2010/main" val="1529238883"/>
+        <p14:creationId xmlns:p14="http://schemas.microsoft.com/office/powerpoint/2010/main" val="2635741980"/>
       </p:ext>
     </p:extLst>
   </p:cSld>
